--- a/presentasi_tesis_upgrade.pptx
+++ b/presentasi_tesis_upgrade.pptx
@@ -958,7 +958,7 @@
           <a:p>
             <a:fld id="{5BCAD085-E8A6-8845-BD4E-CB4CCA059FC4}" type="datetimeFigureOut">
               <a:rPr lang="en-US" smtClean="0"/>
-              <a:t>5/25/2026</a:t>
+              <a:t>5/26/2026</a:t>
             </a:fld>
             <a:endParaRPr lang="en-US"/>
           </a:p>
@@ -1126,7 +1126,7 @@
           <a:p>
             <a:fld id="{5BCAD085-E8A6-8845-BD4E-CB4CCA059FC4}" type="datetimeFigureOut">
               <a:rPr lang="en-US" smtClean="0"/>
-              <a:t>5/25/2026</a:t>
+              <a:t>5/26/2026</a:t>
             </a:fld>
             <a:endParaRPr lang="en-US"/>
           </a:p>
@@ -1304,7 +1304,7 @@
           <a:p>
             <a:fld id="{5BCAD085-E8A6-8845-BD4E-CB4CCA059FC4}" type="datetimeFigureOut">
               <a:rPr lang="en-US" smtClean="0"/>
-              <a:t>5/25/2026</a:t>
+              <a:t>5/26/2026</a:t>
             </a:fld>
             <a:endParaRPr lang="en-US"/>
           </a:p>
@@ -1472,7 +1472,7 @@
           <a:p>
             <a:fld id="{5BCAD085-E8A6-8845-BD4E-CB4CCA059FC4}" type="datetimeFigureOut">
               <a:rPr lang="en-US" smtClean="0"/>
-              <a:t>5/25/2026</a:t>
+              <a:t>5/26/2026</a:t>
             </a:fld>
             <a:endParaRPr lang="en-US"/>
           </a:p>
@@ -1717,7 +1717,7 @@
           <a:p>
             <a:fld id="{5BCAD085-E8A6-8845-BD4E-CB4CCA059FC4}" type="datetimeFigureOut">
               <a:rPr lang="en-US" smtClean="0"/>
-              <a:t>5/25/2026</a:t>
+              <a:t>5/26/2026</a:t>
             </a:fld>
             <a:endParaRPr lang="en-US"/>
           </a:p>
@@ -2002,7 +2002,7 @@
           <a:p>
             <a:fld id="{5BCAD085-E8A6-8845-BD4E-CB4CCA059FC4}" type="datetimeFigureOut">
               <a:rPr lang="en-US" smtClean="0"/>
-              <a:t>5/25/2026</a:t>
+              <a:t>5/26/2026</a:t>
             </a:fld>
             <a:endParaRPr lang="en-US"/>
           </a:p>
@@ -2421,7 +2421,7 @@
           <a:p>
             <a:fld id="{5BCAD085-E8A6-8845-BD4E-CB4CCA059FC4}" type="datetimeFigureOut">
               <a:rPr lang="en-US" smtClean="0"/>
-              <a:t>5/25/2026</a:t>
+              <a:t>5/26/2026</a:t>
             </a:fld>
             <a:endParaRPr lang="en-US"/>
           </a:p>
@@ -2538,7 +2538,7 @@
           <a:p>
             <a:fld id="{5BCAD085-E8A6-8845-BD4E-CB4CCA059FC4}" type="datetimeFigureOut">
               <a:rPr lang="en-US" smtClean="0"/>
-              <a:t>5/25/2026</a:t>
+              <a:t>5/26/2026</a:t>
             </a:fld>
             <a:endParaRPr lang="en-US"/>
           </a:p>
@@ -2633,7 +2633,7 @@
           <a:p>
             <a:fld id="{5BCAD085-E8A6-8845-BD4E-CB4CCA059FC4}" type="datetimeFigureOut">
               <a:rPr lang="en-US" smtClean="0"/>
-              <a:t>5/25/2026</a:t>
+              <a:t>5/26/2026</a:t>
             </a:fld>
             <a:endParaRPr lang="en-US"/>
           </a:p>
@@ -2908,7 +2908,7 @@
           <a:p>
             <a:fld id="{5BCAD085-E8A6-8845-BD4E-CB4CCA059FC4}" type="datetimeFigureOut">
               <a:rPr lang="en-US" smtClean="0"/>
-              <a:t>5/25/2026</a:t>
+              <a:t>5/26/2026</a:t>
             </a:fld>
             <a:endParaRPr lang="en-US"/>
           </a:p>
@@ -3160,7 +3160,7 @@
           <a:p>
             <a:fld id="{5BCAD085-E8A6-8845-BD4E-CB4CCA059FC4}" type="datetimeFigureOut">
               <a:rPr lang="en-US" smtClean="0"/>
-              <a:t>5/25/2026</a:t>
+              <a:t>5/26/2026</a:t>
             </a:fld>
             <a:endParaRPr lang="en-US"/>
           </a:p>
@@ -3371,7 +3371,7 @@
           <a:p>
             <a:fld id="{5BCAD085-E8A6-8845-BD4E-CB4CCA059FC4}" type="datetimeFigureOut">
               <a:rPr lang="en-US" smtClean="0"/>
-              <a:t>5/25/2026</a:t>
+              <a:t>5/26/2026</a:t>
             </a:fld>
             <a:endParaRPr lang="en-US"/>
           </a:p>
@@ -3761,15 +3761,17 @@
           <p:nvPr/>
         </p:nvPicPr>
         <p:blipFill>
-          <a:blip r:embed="rId2"/>
+          <a:blip r:embed="rId2">
+            <a:alphaModFix amt="70000"/>
+          </a:blip>
           <a:stretch>
             <a:fillRect/>
           </a:stretch>
         </p:blipFill>
         <p:spPr>
           <a:xfrm>
-            <a:off x="-968188" y="-726141"/>
-            <a:ext cx="11887200" cy="8915400"/>
+            <a:off x="-1364428" y="-571500"/>
+            <a:ext cx="11056086" cy="8915400"/>
           </a:xfrm>
           <a:prstGeom prst="rect">
             <a:avLst/>
@@ -3788,38 +3790,85 @@
         </p:nvSpPr>
         <p:spPr>
           <a:xfrm>
-            <a:off x="685800" y="660400"/>
-            <a:ext cx="7772400" cy="1470025"/>
+            <a:off x="355600" y="-233680"/>
+            <a:ext cx="8219440" cy="2286000"/>
           </a:xfrm>
         </p:spPr>
         <p:txBody>
-          <a:bodyPr/>
-          <a:lstStyle/>
-          <a:p>
-            <a:r>
-              <a:rPr dirty="0" err="1"/>
-              <a:t>Analisis</a:t>
-            </a:r>
-            <a:r>
-              <a:rPr dirty="0"/>
+          <a:bodyPr>
+            <a:normAutofit/>
+          </a:bodyPr>
+          <a:lstStyle/>
+          <a:p>
+            <a:r>
+              <a:rPr lang="en-US" sz="2400" b="1" dirty="0">
+                <a:solidFill>
+                  <a:schemeClr val="tx2">
+                    <a:lumMod val="50000"/>
+                  </a:schemeClr>
+                </a:solidFill>
+              </a:rPr>
+              <a:t>ANALISIS PEMODELAN TOPIK PADA TEKS TERJEMAHAN AL-QUR’AN BERBAHASA INDONESIA DENGAN METODE</a:t>
+            </a:r>
+            <a:r>
+              <a:rPr lang="en-US" sz="2400" b="1" i="1" dirty="0">
+                <a:solidFill>
+                  <a:schemeClr val="tx2">
+                    <a:lumMod val="50000"/>
+                  </a:schemeClr>
+                </a:solidFill>
+              </a:rPr>
+              <a:t> CORRELATED TOPIC MODELING </a:t>
+            </a:r>
+            <a:r>
+              <a:rPr lang="en-US" sz="2400" b="1" dirty="0">
+                <a:solidFill>
+                  <a:schemeClr val="tx2">
+                    <a:lumMod val="50000"/>
+                  </a:schemeClr>
+                </a:solidFill>
+              </a:rPr>
+              <a:t>(CTM) </a:t>
+            </a:r>
+            <a:br>
+              <a:rPr lang="en-US" sz="2400" b="1" dirty="0">
+                <a:solidFill>
+                  <a:schemeClr val="tx2">
+                    <a:lumMod val="50000"/>
+                  </a:schemeClr>
+                </a:solidFill>
+              </a:rPr>
+            </a:br>
+            <a:r>
+              <a:rPr lang="en-US" sz="2400" b="1" dirty="0">
+                <a:solidFill>
+                  <a:schemeClr val="tx2">
+                    <a:lumMod val="50000"/>
+                  </a:schemeClr>
+                </a:solidFill>
+              </a:rPr>
+              <a:t>DAN </a:t>
+            </a:r>
+            <a:r>
+              <a:rPr lang="en-US" sz="2400" b="1" i="1" dirty="0">
+                <a:solidFill>
+                  <a:schemeClr val="tx2">
+                    <a:lumMod val="50000"/>
+                  </a:schemeClr>
+                </a:solidFill>
+              </a:rPr>
+              <a:t>BERTOPIC</a:t>
+            </a:r>
+            <a:r>
+              <a:rPr lang="en-US" sz="2400" b="1" dirty="0">
+                <a:solidFill>
+                  <a:schemeClr val="tx2">
+                    <a:lumMod val="50000"/>
+                  </a:schemeClr>
+                </a:solidFill>
+              </a:rPr>
               <a:t> </a:t>
             </a:r>
-            <a:r>
-              <a:rPr dirty="0" err="1"/>
-              <a:t>Pemodelan</a:t>
-            </a:r>
-            <a:r>
-              <a:rPr dirty="0"/>
-              <a:t> </a:t>
-            </a:r>
-            <a:r>
-              <a:rPr dirty="0" err="1"/>
-              <a:t>Topik</a:t>
-            </a:r>
-            <a:r>
-              <a:rPr dirty="0"/>
-              <a:t> Al-Qur'an</a:t>
-            </a:r>
           </a:p>
         </p:txBody>
       </p:sp>
@@ -3833,22 +3882,117 @@
             <p:ph type="subTitle" idx="1"/>
           </p:nvPr>
         </p:nvSpPr>
-        <p:spPr/>
-        <p:txBody>
-          <a:bodyPr/>
-          <a:lstStyle/>
-          <a:p>
-            <a:r>
-              <a:t>CTM vs BERTopic</a:t>
-            </a:r>
-          </a:p>
-          <a:p>
-            <a:r>
-              <a:t>Asep Ridwan Hidayat</a:t>
-            </a:r>
-          </a:p>
-        </p:txBody>
-      </p:sp>
+        <p:spPr>
+          <a:xfrm>
+            <a:off x="934720" y="3833494"/>
+            <a:ext cx="7305040" cy="1364616"/>
+          </a:xfrm>
+        </p:spPr>
+        <p:txBody>
+          <a:bodyPr>
+            <a:noAutofit/>
+          </a:bodyPr>
+          <a:lstStyle/>
+          <a:p>
+            <a:r>
+              <a:rPr lang="en-US" sz="2400" b="1" dirty="0">
+                <a:solidFill>
+                  <a:schemeClr val="tx2">
+                    <a:lumMod val="50000"/>
+                  </a:schemeClr>
+                </a:solidFill>
+              </a:rPr>
+              <a:t>OLEH: </a:t>
+            </a:r>
+            <a:endParaRPr lang="en-US" sz="2400" dirty="0">
+              <a:solidFill>
+                <a:schemeClr val="tx2">
+                  <a:lumMod val="50000"/>
+                </a:schemeClr>
+              </a:solidFill>
+            </a:endParaRPr>
+          </a:p>
+          <a:p>
+            <a:r>
+              <a:rPr lang="en-US" sz="2400" b="1" dirty="0">
+                <a:solidFill>
+                  <a:schemeClr val="tx2">
+                    <a:lumMod val="50000"/>
+                  </a:schemeClr>
+                </a:solidFill>
+              </a:rPr>
+              <a:t>ASEP RIDWAN HIDAYAT</a:t>
+            </a:r>
+            <a:endParaRPr lang="en-US" sz="2400" dirty="0">
+              <a:solidFill>
+                <a:schemeClr val="tx2">
+                  <a:lumMod val="50000"/>
+                </a:schemeClr>
+              </a:solidFill>
+            </a:endParaRPr>
+          </a:p>
+          <a:p>
+            <a:r>
+              <a:rPr lang="en-US" sz="2400" b="1" dirty="0">
+                <a:solidFill>
+                  <a:schemeClr val="tx2">
+                    <a:lumMod val="50000"/>
+                  </a:schemeClr>
+                </a:solidFill>
+              </a:rPr>
+              <a:t>231012050036</a:t>
+            </a:r>
+            <a:endParaRPr lang="en-US" sz="2400" dirty="0">
+              <a:solidFill>
+                <a:schemeClr val="tx2">
+                  <a:lumMod val="50000"/>
+                </a:schemeClr>
+              </a:solidFill>
+            </a:endParaRPr>
+          </a:p>
+        </p:txBody>
+      </p:sp>
+      <p:pic>
+        <p:nvPicPr>
+          <p:cNvPr id="5" name="Picture 4" descr="Description: Logo_warna2">
+            <a:extLst>
+              <a:ext uri="{FF2B5EF4-FFF2-40B4-BE49-F238E27FC236}">
+                <a16:creationId xmlns:a16="http://schemas.microsoft.com/office/drawing/2014/main" id="{851373BC-50CA-0563-22B8-567122BFB824}"/>
+              </a:ext>
+            </a:extLst>
+          </p:cNvPr>
+          <p:cNvPicPr>
+            <a:picLocks noChangeAspect="1"/>
+          </p:cNvPicPr>
+          <p:nvPr/>
+        </p:nvPicPr>
+        <p:blipFill>
+          <a:blip r:embed="rId3">
+            <a:extLst>
+              <a:ext uri="{28A0092B-C50C-407E-A947-70E740481C1C}">
+                <a14:useLocalDpi xmlns:a14="http://schemas.microsoft.com/office/drawing/2010/main" val="0"/>
+              </a:ext>
+            </a:extLst>
+          </a:blip>
+          <a:srcRect/>
+          <a:stretch>
+            <a:fillRect/>
+          </a:stretch>
+        </p:blipFill>
+        <p:spPr bwMode="auto">
+          <a:xfrm>
+            <a:off x="3849687" y="1988184"/>
+            <a:ext cx="1475105" cy="1440815"/>
+          </a:xfrm>
+          <a:prstGeom prst="rect">
+            <a:avLst/>
+          </a:prstGeom>
+          <a:noFill/>
+          <a:ln>
+            <a:noFill/>
+          </a:ln>
+        </p:spPr>
+      </p:pic>
     </p:spTree>
   </p:cSld>
   <p:clrMapOvr>
@@ -4124,7 +4268,12 @@
             <p:ph type="title"/>
           </p:nvPr>
         </p:nvSpPr>
-        <p:spPr/>
+        <p:spPr>
+          <a:xfrm>
+            <a:off x="457200" y="-74630"/>
+            <a:ext cx="8229600" cy="1143000"/>
+          </a:xfrm>
+        </p:spPr>
         <p:txBody>
           <a:bodyPr/>
           <a:lstStyle/>
